--- a/ProgrammingJavaScript/Lectures/Week6/Week6.pptx
+++ b/ProgrammingJavaScript/Lectures/Week6/Week6.pptx
@@ -5910,7 +5910,11 @@
           <a:p>
             <a:r>
               <a:rPr lang="en-US" dirty="0"/>
-              <a:t>NOW, we can use functional components with HOOKS.</a:t>
+              <a:t>NOW, we can use functional components with </a:t>
+            </a:r>
+            <a:r>
+              <a:rPr lang="en-US" b="1" dirty="0"/>
+              <a:t>HOOKS.</a:t>
             </a:r>
           </a:p>
         </p:txBody>
@@ -5993,6 +5997,9 @@
         <p:txBody>
           <a:bodyPr/>
           <a:lstStyle/>
+          <a:p>
+            <a:endParaRPr lang="en-US"/>
+          </a:p>
           <a:p>
             <a:r>
               <a:rPr lang="en-US" dirty="0" err="1"/>
@@ -6582,20 +6589,20 @@
 </file>
 
 <file path=customXml/item2.xml><?xml version="1.0" encoding="utf-8"?>
+<p:properties xmlns:p="http://schemas.microsoft.com/office/2006/metadata/properties" xmlns:xsi="http://www.w3.org/2001/XMLSchema-instance" xmlns:pc="http://schemas.microsoft.com/office/infopath/2007/PartnerControls">
+  <documentManagement>
+    <_activity xmlns="3411811a-9679-404d-9a25-72d18bdd7fe0" xsi:nil="true"/>
+  </documentManagement>
+</p:properties>
+</file>
+
+<file path=customXml/item3.xml><?xml version="1.0" encoding="utf-8"?>
 <?mso-contentType ?>
 <FormTemplates xmlns="http://schemas.microsoft.com/sharepoint/v3/contenttype/forms">
   <Display>DocumentLibraryForm</Display>
   <Edit>DocumentLibraryForm</Edit>
   <New>DocumentLibraryForm</New>
 </FormTemplates>
-</file>
-
-<file path=customXml/item3.xml><?xml version="1.0" encoding="utf-8"?>
-<p:properties xmlns:p="http://schemas.microsoft.com/office/2006/metadata/properties" xmlns:xsi="http://www.w3.org/2001/XMLSchema-instance" xmlns:pc="http://schemas.microsoft.com/office/infopath/2007/PartnerControls">
-  <documentManagement>
-    <_activity xmlns="3411811a-9679-404d-9a25-72d18bdd7fe0" xsi:nil="true"/>
-  </documentManagement>
-</p:properties>
 </file>
 
 <file path=customXml/itemProps1.xml><?xml version="1.0" encoding="utf-8"?>
@@ -6618,14 +6625,6 @@
 </file>
 
 <file path=customXml/itemProps2.xml><?xml version="1.0" encoding="utf-8"?>
-<ds:datastoreItem xmlns:ds="http://schemas.openxmlformats.org/officeDocument/2006/customXml" ds:itemID="{E8BB6B1C-BAF3-481B-9730-CAD213F6DDAE}">
-  <ds:schemaRefs>
-    <ds:schemaRef ds:uri="http://schemas.microsoft.com/sharepoint/v3/contenttype/forms"/>
-  </ds:schemaRefs>
-</ds:datastoreItem>
-</file>
-
-<file path=customXml/itemProps3.xml><?xml version="1.0" encoding="utf-8"?>
 <ds:datastoreItem xmlns:ds="http://schemas.openxmlformats.org/officeDocument/2006/customXml" ds:itemID="{18AA77F1-D886-4759-9B03-D44DA3069A71}">
   <ds:schemaRefs>
     <ds:schemaRef ds:uri="http://www.w3.org/XML/1998/namespace"/>
@@ -6640,4 +6639,12 @@
     <ds:schemaRef ds:uri="http://purl.org/dc/terms/"/>
   </ds:schemaRefs>
 </ds:datastoreItem>
+</file>
+
+<file path=customXml/itemProps3.xml><?xml version="1.0" encoding="utf-8"?>
+<ds:datastoreItem xmlns:ds="http://schemas.openxmlformats.org/officeDocument/2006/customXml" ds:itemID="{E8BB6B1C-BAF3-481B-9730-CAD213F6DDAE}">
+  <ds:schemaRefs>
+    <ds:schemaRef ds:uri="http://schemas.microsoft.com/sharepoint/v3/contenttype/forms"/>
+  </ds:schemaRefs>
+</ds:datastoreItem>
 </file>